--- a/lecons/LSA/Climatology/LSA_CLIM_L21_Mountain_Climates.pptx
+++ b/lecons/LSA/Climatology/LSA_CLIM_L21_Mountain_Climates.pptx
@@ -3019,7 +3019,7 @@
           <a:p>
             <a:r>
               <a:rPr lang="en-US" dirty="0"/>
-              <a:t>Let us copy DEFINITIONS. The key terms of this lesson are defined as follows. Write each point on a new line, with the key term first.</a:t>
+              <a:t>Let us copy the definitions. The key terms of this lesson are defined as follows. On this slide we have Mountain climate and Mountain barrier. Write each point on a new line, with the key term first, and explain it in your own words when we revise.</a:t>
             </a:r>
             <a:endParaRPr lang="en-US" dirty="0"/>
           </a:p>
@@ -3107,7 +3107,7 @@
           <a:p>
             <a:r>
               <a:rPr lang="en-US" dirty="0"/>
-              <a:t>Let us copy Characteristics of Mountain Climates. Mountain climates have the following characteristics. Write each point on a new line, with the key term first. When you finish, we go to the next slide.</a:t>
+              <a:t>Let us copy Characteristics of Mountain Climates. Mountain climates have the following characteristics. On this slide we have Low temperatures. Write each point on a new line, with the key term first, and explain it in your own words when we revise. When you finish, we go to the next slide.</a:t>
             </a:r>
             <a:endParaRPr lang="en-US" dirty="0"/>
           </a:p>
@@ -3195,7 +3195,7 @@
           <a:p>
             <a:r>
               <a:rPr lang="en-US" dirty="0"/>
-              <a:t>We continue with the same part. Write each point on a new line, with the key term first. When you finish, we go to the next slide.</a:t>
+              <a:t>We continue with Characteristics of Mountain Climates. On this slide we have High rainfall on windward slopes and Strong sunshine and winds. Write each point on a new line, with the key term first, and explain it in your own words when we revise. When you finish, we go to the next slide.</a:t>
             </a:r>
             <a:endParaRPr lang="en-US" dirty="0"/>
           </a:p>
@@ -3283,7 +3283,7 @@
           <a:p>
             <a:r>
               <a:rPr lang="en-US" dirty="0"/>
-              <a:t>We continue with the same part. Write each point on a new line, with the key term first.</a:t>
+              <a:t>We continue with Characteristics of Mountain Climates. On this slide we have Vertical zonation. Write each point on a new line, with the key term first, and explain it in your own words when we revise.</a:t>
             </a:r>
             <a:endParaRPr lang="en-US" dirty="0"/>
           </a:p>
@@ -3547,7 +3547,7 @@
           <a:p>
             <a:r>
               <a:rPr lang="en-US" dirty="0"/>
-              <a:t>Let us copy Factors of Mountain Climates. The main factors of mountain climates are. Write each point on a new line, with the key term first. When you finish, we go to the next slide.</a:t>
+              <a:t>Let us copy Factors of Mountain Climates. The main factors of mountain climates are. On this slide we have Altitude and Relief barrier. Write each point on a new line, with the key term first, and explain it in your own words when we revise. When you finish, we go to the next slide.</a:t>
             </a:r>
             <a:endParaRPr lang="en-US" dirty="0"/>
           </a:p>
@@ -3635,7 +3635,7 @@
           <a:p>
             <a:r>
               <a:rPr lang="en-US" dirty="0"/>
-              <a:t>We continue with the same part. Write each point on a new line, with the key term first.</a:t>
+              <a:t>We continue with Factors of Mountain Climates. On this slide we have Aspect and slope. Write each point on a new line, with the key term first, and explain it in your own words when we revise.</a:t>
             </a:r>
             <a:endParaRPr lang="en-US" dirty="0"/>
           </a:p>
@@ -4955,7 +4955,7 @@
           <a:p>
             <a:r>
               <a:rPr lang="en-US" dirty="0"/>
-              <a:t>Here is the plan of our lesson today. We shall correction of the homework; then objectives and recall; then real-life situation and action to take; then learning activities; then board summary; then evaluation, remediation and homework.</a:t>
+              <a:t>Here is the plan of our lesson today. First, we shall correct the homework. Then we shall look at the objectives and recall what you already know. After that, we shall study a situation from real life and the action to take, and do the learning activities. Finally, we shall copy the board summary, do the evaluation and the remediation, and I will give you the homework.</a:t>
             </a:r>
             <a:endParaRPr lang="en-US" dirty="0"/>
           </a:p>
@@ -6495,7 +6495,7 @@
                 <a:ea typeface="Times New Roman" pitchFamily="34" charset="-122"/>
                 <a:cs typeface="Times New Roman" pitchFamily="34" charset="-120"/>
               </a:rPr>
-              <a:t>Lesson 21: Mountain Climates</a:t>
+              <a:t>Lesson 21</a:t>
             </a:r>
             <a:endParaRPr lang="en-US" sz="2600" dirty="0"/>
           </a:p>
